--- a/enterprise-architectuur/niveau-2/deel-15/slidedeck.pptx
+++ b/enterprise-architectuur/niveau-2/deel-15/slidedeck.pptx
@@ -2745,27 +2745,6 @@
             </a:r>
             <a:endParaRPr lang="en-US" sz="1700" dirty="0"/>
           </a:p>
-          <a:p>
-            <a:pPr marL="342900" indent="-342900">
-              <a:spcAft>
-                <a:spcPts val="1200"/>
-              </a:spcAft>
-              <a:buSzPct val="100000"/>
-              <a:buChar char="•"/>
-            </a:pPr>
-            <a:r>
-              <a:rPr lang="en-US" sz="1700" dirty="0">
-                <a:solidFill>
-                  <a:srgbClr val="2A2A2A"/>
-                </a:solidFill>
-                <a:latin typeface="Calibri" pitchFamily="34" charset="0"/>
-                <a:ea typeface="Calibri" pitchFamily="34" charset="-122"/>
-                <a:cs typeface="Calibri" pitchFamily="34" charset="-120"/>
-              </a:rPr>
-              <a:t>## Dagdeel B</a:t>
-            </a:r>
-            <a:endParaRPr lang="en-US" sz="1700" dirty="0"/>
-          </a:p>
         </p:txBody>
       </p:sp>
     </p:spTree>
